--- a/courses/cse3400-f2026/lecture8.pptx
+++ b/courses/cse3400-f2026/lecture8.pptx
@@ -1697,7 +1697,7 @@
                   <a:spcPct val="0"/>
                 </a:spcBef>
               </a:pPr>
-              <a:t>10/23/25</a:t>
+              <a:t>10/8/26</a:t>
             </a:fld>
             <a:endParaRPr lang="en-US" altLang="en-US">
               <a:latin typeface="Arial" panose="020B0604020202020204" pitchFamily="34" charset="0"/>
@@ -3622,7 +3622,7 @@
                   <a:spcPct val="0"/>
                 </a:spcBef>
               </a:pPr>
-              <a:t>10/23/25</a:t>
+              <a:t>10/8/26</a:t>
             </a:fld>
             <a:endParaRPr lang="en-US" altLang="en-US">
               <a:latin typeface="Arial" panose="020B0604020202020204" pitchFamily="34" charset="0"/>
@@ -4038,7 +4038,7 @@
                   <a:spcPct val="0"/>
                 </a:spcBef>
               </a:pPr>
-              <a:t>10/23/25</a:t>
+              <a:t>10/8/26</a:t>
             </a:fld>
             <a:endParaRPr lang="en-US" altLang="en-US">
               <a:latin typeface="Arial" panose="020B0604020202020204" pitchFamily="34" charset="0"/>
@@ -5963,7 +5963,7 @@
                   <a:spcPct val="0"/>
                 </a:spcBef>
               </a:pPr>
-              <a:t>10/23/25</a:t>
+              <a:t>10/8/26</a:t>
             </a:fld>
             <a:endParaRPr lang="en-US" altLang="en-US">
               <a:latin typeface="Arial" panose="020B0604020202020204" pitchFamily="34" charset="0"/>
@@ -15810,14 +15810,14 @@
           <a:p>
             <a:r>
               <a:rPr lang="en-US" sz="3600" dirty="0"/>
-              <a:t>Handshake Entity-Authentication protocol</a:t>
+              <a:t>Handshake Entity Authentication Protocol</a:t>
             </a:r>
             <a:endParaRPr lang="en-US" sz="3600" b="1" dirty="0"/>
           </a:p>
         </p:txBody>
       </p:sp>
-      <mc:AlternateContent xmlns:mc="http://schemas.openxmlformats.org/markup-compatibility/2006" xmlns:a14="http://schemas.microsoft.com/office/drawing/2010/main">
-        <mc:Choice Requires="a14">
+      <mc:AlternateContent xmlns:mc="http://schemas.openxmlformats.org/markup-compatibility/2006">
+        <mc:Choice xmlns:a14="http://schemas.microsoft.com/office/drawing/2010/main" Requires="a14">
           <p:sp>
             <p:nvSpPr>
               <p:cNvPr id="3" name="Content Placeholder 2"/>
@@ -16090,13 +16090,13 @@
                 <a:pPr lvl="1"/>
                 <a:r>
                   <a:rPr lang="en-US" sz="2400" dirty="0"/>
-                  <a:t>(and received messages).</a:t>
+                  <a:t>(and received messages that were sent).</a:t>
                 </a:r>
               </a:p>
             </p:txBody>
           </p:sp>
         </mc:Choice>
-        <mc:Fallback xmlns="">
+        <mc:Fallback>
           <p:sp>
             <p:nvSpPr>
               <p:cNvPr id="3" name="Content Placeholder 2"/>
@@ -27874,7 +27874,7 @@
             </a:pPr>
             <a:r>
               <a:rPr lang="en-US" altLang="en-US" sz="2100" dirty="0"/>
-              <a:t>Do not compute values from Adversary</a:t>
+              <a:t>Do not compute values from adversary (which is encrypting any nonce received in this case).</a:t>
             </a:r>
           </a:p>
           <a:p>
@@ -33399,21 +33399,21 @@
             <a:pPr lvl="1"/>
             <a:r>
               <a:rPr lang="en-US" sz="2000" dirty="0"/>
-              <a:t>Each receiving (input), outputting (output)</a:t>
+              <a:t>That receive inputs and produce outputs based on the function definition (or algorithm workflow/behavior).</a:t>
             </a:r>
           </a:p>
           <a:p>
             <a:pPr lvl="2"/>
             <a:r>
               <a:rPr lang="en-US" sz="2000" dirty="0"/>
-              <a:t>Stateful protocols will have current state as additional input, and updated state as an additional output</a:t>
+              <a:t>Stateful protocols have the current state as additional input, and the updated state as an additional output</a:t>
             </a:r>
           </a:p>
           <a:p>
             <a:pPr lvl="1"/>
             <a:r>
               <a:rPr lang="en-US" sz="2000" dirty="0"/>
-              <a:t>Two (or more) parties (each has its own state)</a:t>
+              <a:t>They involve two (or more) parties (each has its own state)</a:t>
             </a:r>
           </a:p>
           <a:p>
@@ -33431,7 +33431,7 @@
             <a:pPr lvl="1"/>
             <a:r>
               <a:rPr lang="en-US" sz="2000" dirty="0"/>
-              <a:t>Set the initial state of a party.</a:t>
+              <a:t>Set the initial state of a party (i.e., the setup).</a:t>
             </a:r>
           </a:p>
           <a:p>
@@ -33443,20 +33443,10 @@
           </a:p>
           <a:p>
             <a:r>
-              <a:rPr lang="en-US" sz="2400" dirty="0"/>
-              <a:t>Our discussion (from here) is focused</a:t>
-            </a:r>
-            <a:r>
-              <a:rPr lang="en-US" sz="2000" dirty="0">
-                <a:sym typeface="Wingdings" panose="05000000000000000000" pitchFamily="2" charset="2"/>
-              </a:rPr>
-              <a:t> </a:t>
-            </a:r>
-            <a:r>
               <a:rPr lang="en-US" sz="2400" dirty="0">
                 <a:sym typeface="Wingdings" panose="05000000000000000000" pitchFamily="2" charset="2"/>
               </a:rPr>
-              <a:t>on shared-key, two-party protocols, (man in the middle) MitM adversary.</a:t>
+              <a:t>In this chapter, we focus on shared-key, two-party protocols, with MitM (man in the middle) adversary.</a:t>
             </a:r>
             <a:endParaRPr lang="en-US" sz="2000" dirty="0">
               <a:sym typeface="Wingdings" panose="05000000000000000000" pitchFamily="2" charset="2"/>
@@ -34179,7 +34169,7 @@
                 <a:ea typeface="Arial Unicode MS" pitchFamily="2"/>
                 <a:cs typeface="Tahoma" pitchFamily="2"/>
               </a:rPr>
-              <a:t>Secure communication between two parties using shared keys.</a:t>
+              <a:t>Secure communication between two parties using shared keys (so we assume the parties are already initialized with the shared key).</a:t>
             </a:r>
             <a:endParaRPr lang="en-US" sz="3000" i="1" dirty="0"/>
           </a:p>
@@ -34236,13 +34226,13 @@
             </a:r>
             <a:r>
               <a:rPr lang="en-US" sz="3600" b="1" dirty="0"/>
-              <a:t>Record protocol</a:t>
+              <a:t>Record Protocol</a:t>
             </a:r>
           </a:p>
         </p:txBody>
       </p:sp>
-      <mc:AlternateContent xmlns:mc="http://schemas.openxmlformats.org/markup-compatibility/2006" xmlns:a14="http://schemas.microsoft.com/office/drawing/2010/main">
-        <mc:Choice Requires="a14">
+      <mc:AlternateContent xmlns:mc="http://schemas.openxmlformats.org/markup-compatibility/2006">
+        <mc:Choice xmlns:a14="http://schemas.microsoft.com/office/drawing/2010/main" Requires="a14">
           <p:sp>
             <p:nvSpPr>
               <p:cNvPr id="3" name="Content Placeholder 2"/>
@@ -34295,7 +34285,7 @@
                 <a:pPr lvl="1"/>
                 <a:r>
                   <a:rPr lang="en-US" sz="1800" dirty="0"/>
-                  <a:t>Simplify: only-authentication for what Alice sends to Bob</a:t>
+                  <a:t>In its simplest version: only-authentication for what Alice sends to Bob</a:t>
                 </a:r>
               </a:p>
               <a:p>
@@ -34501,7 +34491,7 @@
             </p:txBody>
           </p:sp>
         </mc:Choice>
-        <mc:Fallback xmlns="">
+        <mc:Fallback>
           <p:sp>
             <p:nvSpPr>
               <p:cNvPr id="3" name="Content Placeholder 2"/>
@@ -35051,7 +35041,7 @@
             </a:r>
             <a:r>
               <a:rPr lang="en-US" sz="3600" b="1" dirty="0"/>
-              <a:t>Record protocol</a:t>
+              <a:t>Record Protocol</a:t>
             </a:r>
           </a:p>
         </p:txBody>
@@ -35078,14 +35068,14 @@
           <a:p>
             <a:r>
               <a:rPr lang="en-US" sz="2800" dirty="0"/>
-              <a:t>Design has many simplifications, easily avoided: </a:t>
+              <a:t>The prior design has many simplifications, easily avoided: </a:t>
             </a:r>
           </a:p>
           <a:p>
             <a:pPr lvl="1"/>
             <a:r>
               <a:rPr lang="en-US" sz="2400" dirty="0"/>
-              <a:t>Only message authentication </a:t>
+              <a:t>Covers only message authentication </a:t>
             </a:r>
           </a:p>
           <a:p>
@@ -35093,13 +35083,6 @@
             <a:r>
               <a:rPr lang="en-US" sz="2000" dirty="0"/>
               <a:t>No confidentiality!</a:t>
-            </a:r>
-          </a:p>
-          <a:p>
-            <a:pPr lvl="1"/>
-            <a:r>
-              <a:rPr lang="en-US" sz="2400" dirty="0"/>
-              <a:t>Only ensure same message was sent</a:t>
             </a:r>
           </a:p>
           <a:p>
@@ -35112,7 +35095,7 @@
           <a:p>
             <a:r>
               <a:rPr lang="en-US" sz="2800" dirty="0"/>
-              <a:t>To add confidentiality: use encryption</a:t>
+              <a:t>To add confidentiality: Use encryption</a:t>
             </a:r>
           </a:p>
           <a:p>
@@ -35648,8 +35631,8 @@
           </a:p>
         </p:txBody>
       </p:sp>
-      <mc:AlternateContent xmlns:mc="http://schemas.openxmlformats.org/markup-compatibility/2006">
-        <mc:Choice xmlns:a14="http://schemas.microsoft.com/office/drawing/2010/main" Requires="a14">
+      <mc:AlternateContent xmlns:mc="http://schemas.openxmlformats.org/markup-compatibility/2006" xmlns:a14="http://schemas.microsoft.com/office/drawing/2010/main">
+        <mc:Choice Requires="a14">
           <p:sp>
             <p:nvSpPr>
               <p:cNvPr id="3" name="Content Placeholder 2"/>
@@ -35837,14 +35820,7 @@
                         <a:latin typeface="Cambria Math" panose="02040503050406030204" pitchFamily="18" charset="0"/>
                         <a:sym typeface="Wingdings" panose="05000000000000000000" pitchFamily="2" charset="2"/>
                       </a:rPr>
-                      <m:t> ,</m:t>
-                    </m:r>
-                    <m:r>
-                      <a:rPr lang="en-US" i="1">
-                        <a:latin typeface="Cambria Math" panose="02040503050406030204" pitchFamily="18" charset="0"/>
-                        <a:sym typeface="Wingdings" panose="05000000000000000000" pitchFamily="2" charset="2"/>
-                      </a:rPr>
-                      <m:t> </m:t>
+                      <m:t> , </m:t>
                     </m:r>
                     <m:sSub>
                       <m:sSubPr>
@@ -36039,7 +36015,7 @@
                     <m:sSub>
                       <m:sSubPr>
                         <m:ctrlPr>
-                          <a:rPr lang="en-US" i="1" dirty="0">
+                          <a:rPr lang="en-US" b="0" i="1" dirty="0" smtClean="0">
                             <a:latin typeface="Cambria Math" panose="02040503050406030204" pitchFamily="18" charset="0"/>
                             <a:sym typeface="Wingdings" panose="05000000000000000000" pitchFamily="2" charset="2"/>
                           </a:rPr>
@@ -36109,7 +36085,7 @@
                     <m:sSub>
                       <m:sSubPr>
                         <m:ctrlPr>
-                          <a:rPr lang="en-US" i="1" dirty="0" smtClean="0">
+                          <a:rPr lang="en-US" b="0" i="1" dirty="0" smtClean="0">
                             <a:latin typeface="Cambria Math" panose="02040503050406030204" pitchFamily="18" charset="0"/>
                             <a:sym typeface="Wingdings" panose="05000000000000000000" pitchFamily="2" charset="2"/>
                           </a:rPr>
@@ -36128,7 +36104,7 @@
                         <m:sSub>
                           <m:sSubPr>
                             <m:ctrlPr>
-                              <a:rPr lang="en-US" i="1" dirty="0" smtClean="0">
+                              <a:rPr lang="en-US" b="0" i="1" dirty="0" smtClean="0">
                                 <a:latin typeface="Cambria Math" panose="02040503050406030204" pitchFamily="18" charset="0"/>
                                 <a:sym typeface="Wingdings" panose="05000000000000000000" pitchFamily="2" charset="2"/>
                               </a:rPr>
@@ -36531,7 +36507,7 @@
             </p:txBody>
           </p:sp>
         </mc:Choice>
-        <mc:Fallback>
+        <mc:Fallback xmlns="">
           <p:sp>
             <p:nvSpPr>
               <p:cNvPr id="3" name="Content Placeholder 2"/>
@@ -37108,7 +37084,7 @@
             </a:pPr>
             <a:r>
               <a:rPr lang="en-US" sz="3200" dirty="0"/>
-              <a:t>What does a secure shared-key two-party record protocol mean? </a:t>
+              <a:t>What does a secure shared-key two-party record protocol mean? Ensure integrity </a:t>
             </a:r>
           </a:p>
           <a:p>
@@ -37123,7 +37099,7 @@
             </a:pPr>
             <a:r>
               <a:rPr lang="en-US" sz="3200" dirty="0"/>
-              <a:t>How about the security of the one with confidentially?</a:t>
+              <a:t>How about the security of the one with confidentially? Ensure integrity and confidentiality</a:t>
             </a:r>
           </a:p>
         </p:txBody>
